--- a/poster/Poster - Accelerating Attack and Fault Detection .pptx
+++ b/poster/Poster - Accelerating Attack and Fault Detection .pptx
@@ -300,22 +300,6 @@
             <ac:spMk id="5" creationId="{EC696430-E3E8-19CA-D66C-67559A8443C4}"/>
           </ac:spMkLst>
         </pc:spChg>
-        <pc:spChg chg="add">
-          <ac:chgData name="Choueiri, Samia" userId="b81b9bbb-c87f-490f-9bf9-c5942ec705de" providerId="ADAL" clId="{7FA5B06B-172D-4B88-BD14-3DAB9785FB6E}" dt="2026-04-07T01:44:44.237" v="51"/>
-          <ac:spMkLst>
-            <pc:docMk/>
-            <pc:sldMk cId="0" sldId="256"/>
-            <ac:spMk id="6" creationId="{D85B783F-4EAC-076A-3CF9-FA5B51A9F722}"/>
-          </ac:spMkLst>
-        </pc:spChg>
-        <pc:spChg chg="add">
-          <ac:chgData name="Choueiri, Samia" userId="b81b9bbb-c87f-490f-9bf9-c5942ec705de" providerId="ADAL" clId="{7FA5B06B-172D-4B88-BD14-3DAB9785FB6E}" dt="2026-04-07T01:53:49.360" v="159"/>
-          <ac:spMkLst>
-            <pc:docMk/>
-            <pc:sldMk cId="0" sldId="256"/>
-            <ac:spMk id="10" creationId="{12FDB111-7425-A3CB-18EB-40696E646987}"/>
-          </ac:spMkLst>
-        </pc:spChg>
         <pc:spChg chg="add mod">
           <ac:chgData name="Choueiri, Samia" userId="b81b9bbb-c87f-490f-9bf9-c5942ec705de" providerId="ADAL" clId="{7FA5B06B-172D-4B88-BD14-3DAB9785FB6E}" dt="2026-04-07T02:23:35.477" v="1142" actId="1035"/>
           <ac:spMkLst>
@@ -380,14 +364,6 @@
             <ac:spMk id="42" creationId="{A2B780AA-1835-403D-9431-C77CA5DD4AFE}"/>
           </ac:spMkLst>
         </pc:spChg>
-        <pc:spChg chg="add del">
-          <ac:chgData name="Choueiri, Samia" userId="b81b9bbb-c87f-490f-9bf9-c5942ec705de" providerId="ADAL" clId="{7FA5B06B-172D-4B88-BD14-3DAB9785FB6E}" dt="2026-04-07T02:11:05.851" v="446" actId="478"/>
-          <ac:spMkLst>
-            <pc:docMk/>
-            <pc:sldMk cId="0" sldId="256"/>
-            <ac:spMk id="51" creationId="{652990E8-C7D0-A77C-729B-F6D5121E30FE}"/>
-          </ac:spMkLst>
-        </pc:spChg>
         <pc:spChg chg="mod">
           <ac:chgData name="Choueiri, Samia" userId="b81b9bbb-c87f-490f-9bf9-c5942ec705de" providerId="ADAL" clId="{7FA5B06B-172D-4B88-BD14-3DAB9785FB6E}" dt="2026-04-07T02:11:45.222" v="449" actId="12788"/>
           <ac:spMkLst>
@@ -428,22 +404,6 @@
             <ac:spMk id="73" creationId="{D5A32123-7974-4A0F-B8DF-6C82FB22F596}"/>
           </ac:spMkLst>
         </pc:spChg>
-        <pc:spChg chg="add del">
-          <ac:chgData name="Choueiri, Samia" userId="b81b9bbb-c87f-490f-9bf9-c5942ec705de" providerId="ADAL" clId="{7FA5B06B-172D-4B88-BD14-3DAB9785FB6E}" dt="2026-04-07T02:11:05.851" v="446" actId="478"/>
-          <ac:spMkLst>
-            <pc:docMk/>
-            <pc:sldMk cId="0" sldId="256"/>
-            <ac:spMk id="79" creationId="{0F831EE1-8866-4A3E-8CAB-8624A11FF145}"/>
-          </ac:spMkLst>
-        </pc:spChg>
-        <pc:spChg chg="add del">
-          <ac:chgData name="Choueiri, Samia" userId="b81b9bbb-c87f-490f-9bf9-c5942ec705de" providerId="ADAL" clId="{7FA5B06B-172D-4B88-BD14-3DAB9785FB6E}" dt="2026-04-07T02:11:05.851" v="446" actId="478"/>
-          <ac:spMkLst>
-            <pc:docMk/>
-            <pc:sldMk cId="0" sldId="256"/>
-            <ac:spMk id="81" creationId="{868B6862-5CC5-4906-AC03-EA9661AD1346}"/>
-          </ac:spMkLst>
-        </pc:spChg>
         <pc:spChg chg="mod">
           <ac:chgData name="Choueiri, Samia" userId="b81b9bbb-c87f-490f-9bf9-c5942ec705de" providerId="ADAL" clId="{7FA5B06B-172D-4B88-BD14-3DAB9785FB6E}" dt="2026-04-07T02:23:35.477" v="1142" actId="1035"/>
           <ac:spMkLst>
@@ -468,38 +428,6 @@
             <ac:spMk id="90" creationId="{8C463412-CC68-4A0F-AE72-68EF99EB2F46}"/>
           </ac:spMkLst>
         </pc:spChg>
-        <pc:spChg chg="add del">
-          <ac:chgData name="Choueiri, Samia" userId="b81b9bbb-c87f-490f-9bf9-c5942ec705de" providerId="ADAL" clId="{7FA5B06B-172D-4B88-BD14-3DAB9785FB6E}" dt="2026-04-07T02:11:05.851" v="446" actId="478"/>
-          <ac:spMkLst>
-            <pc:docMk/>
-            <pc:sldMk cId="0" sldId="256"/>
-            <ac:spMk id="109" creationId="{1C903543-5F9B-E5BD-EFB0-F63FF8234509}"/>
-          </ac:spMkLst>
-        </pc:spChg>
-        <pc:grpChg chg="add del mod">
-          <ac:chgData name="Choueiri, Samia" userId="b81b9bbb-c87f-490f-9bf9-c5942ec705de" providerId="ADAL" clId="{7FA5B06B-172D-4B88-BD14-3DAB9785FB6E}" dt="2026-04-07T02:12:31.260" v="593" actId="165"/>
-          <ac:grpSpMkLst>
-            <pc:docMk/>
-            <pc:sldMk cId="0" sldId="256"/>
-            <ac:grpSpMk id="14" creationId="{561928F3-5D57-59AE-806A-E5E4086F1CCC}"/>
-          </ac:grpSpMkLst>
-        </pc:grpChg>
-        <pc:picChg chg="del">
-          <ac:chgData name="Choueiri, Samia" userId="b81b9bbb-c87f-490f-9bf9-c5942ec705de" providerId="ADAL" clId="{7FA5B06B-172D-4B88-BD14-3DAB9785FB6E}" dt="2026-04-07T02:09:55.607" v="440" actId="478"/>
-          <ac:picMkLst>
-            <pc:docMk/>
-            <pc:sldMk cId="0" sldId="256"/>
-            <ac:picMk id="8" creationId="{A19BEBBE-67BC-07C9-BA42-642200D7330F}"/>
-          </ac:picMkLst>
-        </pc:picChg>
-        <pc:picChg chg="add del">
-          <ac:chgData name="Choueiri, Samia" userId="b81b9bbb-c87f-490f-9bf9-c5942ec705de" providerId="ADAL" clId="{7FA5B06B-172D-4B88-BD14-3DAB9785FB6E}" dt="2026-04-07T02:11:05.851" v="446" actId="478"/>
-          <ac:picMkLst>
-            <pc:docMk/>
-            <pc:sldMk cId="0" sldId="256"/>
-            <ac:picMk id="9" creationId="{A3BCA522-D498-E154-16FA-A7EBECF7D83C}"/>
-          </ac:picMkLst>
-        </pc:picChg>
         <pc:picChg chg="add mod">
           <ac:chgData name="Choueiri, Samia" userId="b81b9bbb-c87f-490f-9bf9-c5942ec705de" providerId="ADAL" clId="{7FA5B06B-172D-4B88-BD14-3DAB9785FB6E}" dt="2026-04-07T13:28:59.490" v="1189" actId="1037"/>
           <ac:picMkLst>
@@ -522,12 +450,12 @@
   <pc:docChgLst>
     <pc:chgData name="Choueiri, Samia" userId="b81b9bbb-c87f-490f-9bf9-c5942ec705de" providerId="ADAL" clId="{28651051-5F40-41E7-92BC-0B48539B80E0}"/>
     <pc:docChg chg="undo redo custSel modSld">
-      <pc:chgData name="Choueiri, Samia" userId="b81b9bbb-c87f-490f-9bf9-c5942ec705de" providerId="ADAL" clId="{28651051-5F40-41E7-92BC-0B48539B80E0}" dt="2026-04-08T19:25:47.543" v="3920" actId="1038"/>
+      <pc:chgData name="Choueiri, Samia" userId="b81b9bbb-c87f-490f-9bf9-c5942ec705de" providerId="ADAL" clId="{28651051-5F40-41E7-92BC-0B48539B80E0}" dt="2026-04-09T03:28:14.756" v="3922" actId="20577"/>
       <pc:docMkLst>
         <pc:docMk/>
       </pc:docMkLst>
       <pc:sldChg chg="addSp delSp modSp mod">
-        <pc:chgData name="Choueiri, Samia" userId="b81b9bbb-c87f-490f-9bf9-c5942ec705de" providerId="ADAL" clId="{28651051-5F40-41E7-92BC-0B48539B80E0}" dt="2026-04-08T19:25:47.543" v="3920" actId="1038"/>
+        <pc:chgData name="Choueiri, Samia" userId="b81b9bbb-c87f-490f-9bf9-c5942ec705de" providerId="ADAL" clId="{28651051-5F40-41E7-92BC-0B48539B80E0}" dt="2026-04-09T03:28:14.756" v="3922" actId="20577"/>
         <pc:sldMkLst>
           <pc:docMk/>
           <pc:sldMk cId="0" sldId="256"/>
@@ -725,7 +653,7 @@
           </ac:spMkLst>
         </pc:spChg>
         <pc:spChg chg="add mod">
-          <ac:chgData name="Choueiri, Samia" userId="b81b9bbb-c87f-490f-9bf9-c5942ec705de" providerId="ADAL" clId="{28651051-5F40-41E7-92BC-0B48539B80E0}" dt="2026-04-08T14:03:24.061" v="2793" actId="20577"/>
+          <ac:chgData name="Choueiri, Samia" userId="b81b9bbb-c87f-490f-9bf9-c5942ec705de" providerId="ADAL" clId="{28651051-5F40-41E7-92BC-0B48539B80E0}" dt="2026-04-09T03:28:14.756" v="3922" actId="20577"/>
           <ac:spMkLst>
             <pc:docMk/>
             <pc:sldMk cId="0" sldId="256"/>
@@ -9340,7 +9268,7 @@
                 <a:effectLst/>
                 <a:latin typeface="Quattrocento" panose="02020802030000000404" pitchFamily="18" charset="0"/>
               </a:rPr>
-              <a:t>Evaluating Online Inference time</a:t>
+              <a:t>Evaluating Online Inference Time</a:t>
             </a:r>
           </a:p>
         </p:txBody>
@@ -12949,6 +12877,21 @@
 </file>
 
 <file path=customXml/item1.xml><?xml version="1.0" encoding="utf-8"?>
+<?mso-contentType ?>
+<FormTemplates xmlns="http://schemas.microsoft.com/sharepoint/v3/contenttype/forms">
+  <Display>DocumentLibraryForm</Display>
+  <Edit>DocumentLibraryForm</Edit>
+  <New>DocumentLibraryForm</New>
+</FormTemplates>
+</file>
+
+<file path=customXml/item2.xml><?xml version="1.0" encoding="utf-8"?>
+<p:properties xmlns:p="http://schemas.microsoft.com/office/2006/metadata/properties" xmlns:xsi="http://www.w3.org/2001/XMLSchema-instance" xmlns:pc="http://schemas.microsoft.com/office/infopath/2007/PartnerControls">
+  <documentManagement/>
+</p:properties>
+</file>
+
+<file path=customXml/item3.xml><?xml version="1.0" encoding="utf-8"?>
 <ct:contentTypeSchema xmlns:ct="http://schemas.microsoft.com/office/2006/metadata/contentType" xmlns:ma="http://schemas.microsoft.com/office/2006/metadata/properties/metaAttributes" ct:_="" ma:_="" ma:contentTypeName="Document" ma:contentTypeID="0x010100BB5A1244B708FF478772D9F5BE92EA81" ma:contentTypeVersion="12" ma:contentTypeDescription="Create a new document." ma:contentTypeScope="" ma:versionID="ef82babfd6a87b1b7feeea62825a313b">
   <xsd:schema xmlns:xsd="http://www.w3.org/2001/XMLSchema" xmlns:xs="http://www.w3.org/2001/XMLSchema" xmlns:p="http://schemas.microsoft.com/office/2006/metadata/properties" xmlns:ns3="0e4f2584-2fae-42b4-b977-142c5a2a3cc9" xmlns:ns4="4d62a9a3-2ad3-4c4a-963b-51ff34f52dba" targetNamespace="http://schemas.microsoft.com/office/2006/metadata/properties" ma:root="true" ma:fieldsID="a63f099aa2e7595213fa8dcb9381ecc2" ns3:_="" ns4:_="">
     <xsd:import namespace="0e4f2584-2fae-42b4-b977-142c5a2a3cc9"/>
@@ -13165,36 +13108,10 @@
 </ct:contentTypeSchema>
 </file>
 
-<file path=customXml/item2.xml><?xml version="1.0" encoding="utf-8"?>
-<p:properties xmlns:p="http://schemas.microsoft.com/office/2006/metadata/properties" xmlns:xsi="http://www.w3.org/2001/XMLSchema-instance" xmlns:pc="http://schemas.microsoft.com/office/infopath/2007/PartnerControls">
-  <documentManagement/>
-</p:properties>
-</file>
-
-<file path=customXml/item3.xml><?xml version="1.0" encoding="utf-8"?>
-<?mso-contentType ?>
-<FormTemplates xmlns="http://schemas.microsoft.com/sharepoint/v3/contenttype/forms">
-  <Display>DocumentLibraryForm</Display>
-  <Edit>DocumentLibraryForm</Edit>
-  <New>DocumentLibraryForm</New>
-</FormTemplates>
-</file>
-
 <file path=customXml/itemProps1.xml><?xml version="1.0" encoding="utf-8"?>
-<ds:datastoreItem xmlns:ds="http://schemas.openxmlformats.org/officeDocument/2006/customXml" ds:itemID="{CAE235FB-D347-497E-8BFC-EDEF0B170812}">
+<ds:datastoreItem xmlns:ds="http://schemas.openxmlformats.org/officeDocument/2006/customXml" ds:itemID="{5D8B9D93-2181-4C1B-BE06-E15C2576BD8C}">
   <ds:schemaRefs>
-    <ds:schemaRef ds:uri="http://schemas.microsoft.com/office/2006/metadata/contentType"/>
-    <ds:schemaRef ds:uri="http://schemas.microsoft.com/office/2006/metadata/properties/metaAttributes"/>
-    <ds:schemaRef ds:uri="http://www.w3.org/2001/XMLSchema"/>
-    <ds:schemaRef ds:uri="http://schemas.microsoft.com/office/2006/metadata/properties"/>
-    <ds:schemaRef ds:uri="0e4f2584-2fae-42b4-b977-142c5a2a3cc9"/>
-    <ds:schemaRef ds:uri="4d62a9a3-2ad3-4c4a-963b-51ff34f52dba"/>
-    <ds:schemaRef ds:uri="http://schemas.microsoft.com/office/2006/documentManagement/types"/>
-    <ds:schemaRef ds:uri="http://schemas.microsoft.com/office/infopath/2007/PartnerControls"/>
-    <ds:schemaRef ds:uri="http://schemas.openxmlformats.org/package/2006/metadata/core-properties"/>
-    <ds:schemaRef ds:uri="http://purl.org/dc/elements/1.1/"/>
-    <ds:schemaRef ds:uri="http://purl.org/dc/terms/"/>
-    <ds:schemaRef ds:uri="http://schemas.microsoft.com/internal/obd"/>
+    <ds:schemaRef ds:uri="http://schemas.microsoft.com/sharepoint/v3/contenttype/forms"/>
   </ds:schemaRefs>
 </ds:datastoreItem>
 </file>
@@ -13217,9 +13134,20 @@
 </file>
 
 <file path=customXml/itemProps3.xml><?xml version="1.0" encoding="utf-8"?>
-<ds:datastoreItem xmlns:ds="http://schemas.openxmlformats.org/officeDocument/2006/customXml" ds:itemID="{5D8B9D93-2181-4C1B-BE06-E15C2576BD8C}">
+<ds:datastoreItem xmlns:ds="http://schemas.openxmlformats.org/officeDocument/2006/customXml" ds:itemID="{CAE235FB-D347-497E-8BFC-EDEF0B170812}">
   <ds:schemaRefs>
-    <ds:schemaRef ds:uri="http://schemas.microsoft.com/sharepoint/v3/contenttype/forms"/>
+    <ds:schemaRef ds:uri="http://schemas.microsoft.com/office/2006/metadata/contentType"/>
+    <ds:schemaRef ds:uri="http://schemas.microsoft.com/office/2006/metadata/properties/metaAttributes"/>
+    <ds:schemaRef ds:uri="http://www.w3.org/2001/XMLSchema"/>
+    <ds:schemaRef ds:uri="http://schemas.microsoft.com/office/2006/metadata/properties"/>
+    <ds:schemaRef ds:uri="0e4f2584-2fae-42b4-b977-142c5a2a3cc9"/>
+    <ds:schemaRef ds:uri="4d62a9a3-2ad3-4c4a-963b-51ff34f52dba"/>
+    <ds:schemaRef ds:uri="http://schemas.microsoft.com/office/2006/documentManagement/types"/>
+    <ds:schemaRef ds:uri="http://schemas.microsoft.com/office/infopath/2007/PartnerControls"/>
+    <ds:schemaRef ds:uri="http://schemas.openxmlformats.org/package/2006/metadata/core-properties"/>
+    <ds:schemaRef ds:uri="http://purl.org/dc/elements/1.1/"/>
+    <ds:schemaRef ds:uri="http://purl.org/dc/terms/"/>
+    <ds:schemaRef ds:uri="http://schemas.microsoft.com/internal/obd"/>
   </ds:schemaRefs>
 </ds:datastoreItem>
 </file>